--- a/docs/slides/02_architecture.pptx
+++ b/docs/slides/02_architecture.pptx
@@ -5,9 +5,9 @@
     <p:sldMasterId id="2147483648" r:id="rId1"/>
   </p:sldMasterIdLst>
   <p:sldIdLst>
-    <p:sldId id="256" r:id="rId7"/>
+    <p:sldId id="256" r:id="rId2"/>
   </p:sldIdLst>
-  <p:sldSz cx="12193200" cy="6858000" type="screen4x3"/>
+  <p:sldSz cx="12193588" cy="6858000"/>
   <p:notesSz cx="6858000" cy="9144000"/>
   <p:defaultTextStyle>
     <a:defPPr>
@@ -104,6 +104,22 @@
       </a:defRPr>
     </a:lvl9pPr>
   </p:defaultTextStyle>
+  <p:extLst>
+    <p:ext uri="{EFAFB233-063F-42B5-8137-9DF3F51BA10A}">
+      <p15:sldGuideLst xmlns:p15="http://schemas.microsoft.com/office/powerpoint/2012/main">
+        <p15:guide id="1" orient="horz" pos="2160">
+          <p15:clr>
+            <a:srgbClr val="A4A3A4"/>
+          </p15:clr>
+        </p15:guide>
+        <p15:guide id="2" pos="2880">
+          <p15:clr>
+            <a:srgbClr val="A4A3A4"/>
+          </p15:clr>
+        </p15:guide>
+      </p15:sldGuideLst>
+    </p:ext>
+  </p:extLst>
 </p:presentation>
 </file>
 
@@ -145,10 +161,9 @@
           <a:lstStyle/>
           <a:p>
             <a:r>
-              <a:rPr lang="en-US" smtClean="0"/>
+              <a:rPr lang="en-US"/>
               <a:t>Click to edit Master title style</a:t>
             </a:r>
-            <a:endParaRPr lang="en-US"/>
           </a:p>
         </p:txBody>
       </p:sp>
@@ -264,10 +279,9 @@
           </a:lstStyle>
           <a:p>
             <a:r>
-              <a:rPr lang="en-US" smtClean="0"/>
+              <a:rPr lang="en-US"/>
               <a:t>Click to edit Master subtitle style</a:t>
             </a:r>
-            <a:endParaRPr lang="en-US"/>
           </a:p>
         </p:txBody>
       </p:sp>
@@ -288,7 +302,7 @@
           <a:p>
             <a:fld id="{5BCAD085-E8A6-8845-BD4E-CB4CCA059FC4}" type="datetimeFigureOut">
               <a:rPr lang="en-US" smtClean="0"/>
-              <a:t>1/27/13</a:t>
+              <a:t>10/29/2026</a:t>
             </a:fld>
             <a:endParaRPr lang="en-US"/>
           </a:p>
@@ -382,10 +396,9 @@
           <a:lstStyle/>
           <a:p>
             <a:r>
-              <a:rPr lang="en-US" smtClean="0"/>
+              <a:rPr lang="en-US"/>
               <a:t>Click to edit Master title style</a:t>
             </a:r>
-            <a:endParaRPr lang="en-US"/>
           </a:p>
         </p:txBody>
       </p:sp>
@@ -406,38 +419,37 @@
           <a:p>
             <a:pPr lvl="0"/>
             <a:r>
-              <a:rPr lang="en-US" smtClean="0"/>
+              <a:rPr lang="en-US"/>
               <a:t>Click to edit Master text styles</a:t>
             </a:r>
           </a:p>
           <a:p>
             <a:pPr lvl="1"/>
             <a:r>
-              <a:rPr lang="en-US" smtClean="0"/>
+              <a:rPr lang="en-US"/>
               <a:t>Second level</a:t>
             </a:r>
           </a:p>
           <a:p>
             <a:pPr lvl="2"/>
             <a:r>
-              <a:rPr lang="en-US" smtClean="0"/>
+              <a:rPr lang="en-US"/>
               <a:t>Third level</a:t>
             </a:r>
           </a:p>
           <a:p>
             <a:pPr lvl="3"/>
             <a:r>
-              <a:rPr lang="en-US" smtClean="0"/>
+              <a:rPr lang="en-US"/>
               <a:t>Fourth level</a:t>
             </a:r>
           </a:p>
           <a:p>
             <a:pPr lvl="4"/>
             <a:r>
-              <a:rPr lang="en-US" smtClean="0"/>
+              <a:rPr lang="en-US"/>
               <a:t>Fifth level</a:t>
             </a:r>
-            <a:endParaRPr lang="en-US"/>
           </a:p>
         </p:txBody>
       </p:sp>
@@ -458,7 +470,7 @@
           <a:p>
             <a:fld id="{5BCAD085-E8A6-8845-BD4E-CB4CCA059FC4}" type="datetimeFigureOut">
               <a:rPr lang="en-US" smtClean="0"/>
-              <a:t>1/27/13</a:t>
+              <a:t>10/29/2026</a:t>
             </a:fld>
             <a:endParaRPr lang="en-US"/>
           </a:p>
@@ -557,10 +569,9 @@
           <a:lstStyle/>
           <a:p>
             <a:r>
-              <a:rPr lang="en-US" smtClean="0"/>
+              <a:rPr lang="en-US"/>
               <a:t>Click to edit Master title style</a:t>
             </a:r>
-            <a:endParaRPr lang="en-US"/>
           </a:p>
         </p:txBody>
       </p:sp>
@@ -586,38 +597,37 @@
           <a:p>
             <a:pPr lvl="0"/>
             <a:r>
-              <a:rPr lang="en-US" smtClean="0"/>
+              <a:rPr lang="en-US"/>
               <a:t>Click to edit Master text styles</a:t>
             </a:r>
           </a:p>
           <a:p>
             <a:pPr lvl="1"/>
             <a:r>
-              <a:rPr lang="en-US" smtClean="0"/>
+              <a:rPr lang="en-US"/>
               <a:t>Second level</a:t>
             </a:r>
           </a:p>
           <a:p>
             <a:pPr lvl="2"/>
             <a:r>
-              <a:rPr lang="en-US" smtClean="0"/>
+              <a:rPr lang="en-US"/>
               <a:t>Third level</a:t>
             </a:r>
           </a:p>
           <a:p>
             <a:pPr lvl="3"/>
             <a:r>
-              <a:rPr lang="en-US" smtClean="0"/>
+              <a:rPr lang="en-US"/>
               <a:t>Fourth level</a:t>
             </a:r>
           </a:p>
           <a:p>
             <a:pPr lvl="4"/>
             <a:r>
-              <a:rPr lang="en-US" smtClean="0"/>
+              <a:rPr lang="en-US"/>
               <a:t>Fifth level</a:t>
             </a:r>
-            <a:endParaRPr lang="en-US"/>
           </a:p>
         </p:txBody>
       </p:sp>
@@ -638,7 +648,7 @@
           <a:p>
             <a:fld id="{5BCAD085-E8A6-8845-BD4E-CB4CCA059FC4}" type="datetimeFigureOut">
               <a:rPr lang="en-US" smtClean="0"/>
-              <a:t>1/27/13</a:t>
+              <a:t>10/29/2026</a:t>
             </a:fld>
             <a:endParaRPr lang="en-US"/>
           </a:p>
@@ -732,10 +742,9 @@
           <a:lstStyle/>
           <a:p>
             <a:r>
-              <a:rPr lang="en-US" smtClean="0"/>
+              <a:rPr lang="en-US"/>
               <a:t>Click to edit Master title style</a:t>
             </a:r>
-            <a:endParaRPr lang="en-US"/>
           </a:p>
         </p:txBody>
       </p:sp>
@@ -756,38 +765,37 @@
           <a:p>
             <a:pPr lvl="0"/>
             <a:r>
-              <a:rPr lang="en-US" smtClean="0"/>
+              <a:rPr lang="en-US"/>
               <a:t>Click to edit Master text styles</a:t>
             </a:r>
           </a:p>
           <a:p>
             <a:pPr lvl="1"/>
             <a:r>
-              <a:rPr lang="en-US" smtClean="0"/>
+              <a:rPr lang="en-US"/>
               <a:t>Second level</a:t>
             </a:r>
           </a:p>
           <a:p>
             <a:pPr lvl="2"/>
             <a:r>
-              <a:rPr lang="en-US" smtClean="0"/>
+              <a:rPr lang="en-US"/>
               <a:t>Third level</a:t>
             </a:r>
           </a:p>
           <a:p>
             <a:pPr lvl="3"/>
             <a:r>
-              <a:rPr lang="en-US" smtClean="0"/>
+              <a:rPr lang="en-US"/>
               <a:t>Fourth level</a:t>
             </a:r>
           </a:p>
           <a:p>
             <a:pPr lvl="4"/>
             <a:r>
-              <a:rPr lang="en-US" smtClean="0"/>
+              <a:rPr lang="en-US"/>
               <a:t>Fifth level</a:t>
             </a:r>
-            <a:endParaRPr lang="en-US"/>
           </a:p>
         </p:txBody>
       </p:sp>
@@ -808,7 +816,7 @@
           <a:p>
             <a:fld id="{5BCAD085-E8A6-8845-BD4E-CB4CCA059FC4}" type="datetimeFigureOut">
               <a:rPr lang="en-US" smtClean="0"/>
-              <a:t>1/27/13</a:t>
+              <a:t>10/29/2026</a:t>
             </a:fld>
             <a:endParaRPr lang="en-US"/>
           </a:p>
@@ -911,10 +919,9 @@
           </a:lstStyle>
           <a:p>
             <a:r>
-              <a:rPr lang="en-US" smtClean="0"/>
+              <a:rPr lang="en-US"/>
               <a:t>Click to edit Master title style</a:t>
             </a:r>
-            <a:endParaRPr lang="en-US"/>
           </a:p>
         </p:txBody>
       </p:sp>
@@ -1031,7 +1038,7 @@
           <a:p>
             <a:pPr lvl="0"/>
             <a:r>
-              <a:rPr lang="en-US" smtClean="0"/>
+              <a:rPr lang="en-US"/>
               <a:t>Click to edit Master text styles</a:t>
             </a:r>
           </a:p>
@@ -1054,7 +1061,7 @@
           <a:p>
             <a:fld id="{5BCAD085-E8A6-8845-BD4E-CB4CCA059FC4}" type="datetimeFigureOut">
               <a:rPr lang="en-US" smtClean="0"/>
-              <a:t>1/27/13</a:t>
+              <a:t>10/29/2026</a:t>
             </a:fld>
             <a:endParaRPr lang="en-US"/>
           </a:p>
@@ -1148,10 +1155,9 @@
           <a:lstStyle/>
           <a:p>
             <a:r>
-              <a:rPr lang="en-US" smtClean="0"/>
+              <a:rPr lang="en-US"/>
               <a:t>Click to edit Master title style</a:t>
             </a:r>
-            <a:endParaRPr lang="en-US"/>
           </a:p>
         </p:txBody>
       </p:sp>
@@ -1205,38 +1211,37 @@
           <a:p>
             <a:pPr lvl="0"/>
             <a:r>
-              <a:rPr lang="en-US" smtClean="0"/>
+              <a:rPr lang="en-US"/>
               <a:t>Click to edit Master text styles</a:t>
             </a:r>
           </a:p>
           <a:p>
             <a:pPr lvl="1"/>
             <a:r>
-              <a:rPr lang="en-US" smtClean="0"/>
+              <a:rPr lang="en-US"/>
               <a:t>Second level</a:t>
             </a:r>
           </a:p>
           <a:p>
             <a:pPr lvl="2"/>
             <a:r>
-              <a:rPr lang="en-US" smtClean="0"/>
+              <a:rPr lang="en-US"/>
               <a:t>Third level</a:t>
             </a:r>
           </a:p>
           <a:p>
             <a:pPr lvl="3"/>
             <a:r>
-              <a:rPr lang="en-US" smtClean="0"/>
+              <a:rPr lang="en-US"/>
               <a:t>Fourth level</a:t>
             </a:r>
           </a:p>
           <a:p>
             <a:pPr lvl="4"/>
             <a:r>
-              <a:rPr lang="en-US" smtClean="0"/>
+              <a:rPr lang="en-US"/>
               <a:t>Fifth level</a:t>
             </a:r>
-            <a:endParaRPr lang="en-US"/>
           </a:p>
         </p:txBody>
       </p:sp>
@@ -1290,38 +1295,37 @@
           <a:p>
             <a:pPr lvl="0"/>
             <a:r>
-              <a:rPr lang="en-US" smtClean="0"/>
+              <a:rPr lang="en-US"/>
               <a:t>Click to edit Master text styles</a:t>
             </a:r>
           </a:p>
           <a:p>
             <a:pPr lvl="1"/>
             <a:r>
-              <a:rPr lang="en-US" smtClean="0"/>
+              <a:rPr lang="en-US"/>
               <a:t>Second level</a:t>
             </a:r>
           </a:p>
           <a:p>
             <a:pPr lvl="2"/>
             <a:r>
-              <a:rPr lang="en-US" smtClean="0"/>
+              <a:rPr lang="en-US"/>
               <a:t>Third level</a:t>
             </a:r>
           </a:p>
           <a:p>
             <a:pPr lvl="3"/>
             <a:r>
-              <a:rPr lang="en-US" smtClean="0"/>
+              <a:rPr lang="en-US"/>
               <a:t>Fourth level</a:t>
             </a:r>
           </a:p>
           <a:p>
             <a:pPr lvl="4"/>
             <a:r>
-              <a:rPr lang="en-US" smtClean="0"/>
+              <a:rPr lang="en-US"/>
               <a:t>Fifth level</a:t>
             </a:r>
-            <a:endParaRPr lang="en-US"/>
           </a:p>
         </p:txBody>
       </p:sp>
@@ -1342,7 +1346,7 @@
           <a:p>
             <a:fld id="{5BCAD085-E8A6-8845-BD4E-CB4CCA059FC4}" type="datetimeFigureOut">
               <a:rPr lang="en-US" smtClean="0"/>
-              <a:t>1/27/13</a:t>
+              <a:t>10/29/2026</a:t>
             </a:fld>
             <a:endParaRPr lang="en-US"/>
           </a:p>
@@ -1440,10 +1444,9 @@
           </a:lstStyle>
           <a:p>
             <a:r>
-              <a:rPr lang="en-US" smtClean="0"/>
+              <a:rPr lang="en-US"/>
               <a:t>Click to edit Master title style</a:t>
             </a:r>
-            <a:endParaRPr lang="en-US"/>
           </a:p>
         </p:txBody>
       </p:sp>
@@ -1506,7 +1509,7 @@
           <a:p>
             <a:pPr lvl="0"/>
             <a:r>
-              <a:rPr lang="en-US" smtClean="0"/>
+              <a:rPr lang="en-US"/>
               <a:t>Click to edit Master text styles</a:t>
             </a:r>
           </a:p>
@@ -1562,38 +1565,37 @@
           <a:p>
             <a:pPr lvl="0"/>
             <a:r>
-              <a:rPr lang="en-US" smtClean="0"/>
+              <a:rPr lang="en-US"/>
               <a:t>Click to edit Master text styles</a:t>
             </a:r>
           </a:p>
           <a:p>
             <a:pPr lvl="1"/>
             <a:r>
-              <a:rPr lang="en-US" smtClean="0"/>
+              <a:rPr lang="en-US"/>
               <a:t>Second level</a:t>
             </a:r>
           </a:p>
           <a:p>
             <a:pPr lvl="2"/>
             <a:r>
-              <a:rPr lang="en-US" smtClean="0"/>
+              <a:rPr lang="en-US"/>
               <a:t>Third level</a:t>
             </a:r>
           </a:p>
           <a:p>
             <a:pPr lvl="3"/>
             <a:r>
-              <a:rPr lang="en-US" smtClean="0"/>
+              <a:rPr lang="en-US"/>
               <a:t>Fourth level</a:t>
             </a:r>
           </a:p>
           <a:p>
             <a:pPr lvl="4"/>
             <a:r>
-              <a:rPr lang="en-US" smtClean="0"/>
+              <a:rPr lang="en-US"/>
               <a:t>Fifth level</a:t>
             </a:r>
-            <a:endParaRPr lang="en-US"/>
           </a:p>
         </p:txBody>
       </p:sp>
@@ -1656,7 +1658,7 @@
           <a:p>
             <a:pPr lvl="0"/>
             <a:r>
-              <a:rPr lang="en-US" smtClean="0"/>
+              <a:rPr lang="en-US"/>
               <a:t>Click to edit Master text styles</a:t>
             </a:r>
           </a:p>
@@ -1712,38 +1714,37 @@
           <a:p>
             <a:pPr lvl="0"/>
             <a:r>
-              <a:rPr lang="en-US" smtClean="0"/>
+              <a:rPr lang="en-US"/>
               <a:t>Click to edit Master text styles</a:t>
             </a:r>
           </a:p>
           <a:p>
             <a:pPr lvl="1"/>
             <a:r>
-              <a:rPr lang="en-US" smtClean="0"/>
+              <a:rPr lang="en-US"/>
               <a:t>Second level</a:t>
             </a:r>
           </a:p>
           <a:p>
             <a:pPr lvl="2"/>
             <a:r>
-              <a:rPr lang="en-US" smtClean="0"/>
+              <a:rPr lang="en-US"/>
               <a:t>Third level</a:t>
             </a:r>
           </a:p>
           <a:p>
             <a:pPr lvl="3"/>
             <a:r>
-              <a:rPr lang="en-US" smtClean="0"/>
+              <a:rPr lang="en-US"/>
               <a:t>Fourth level</a:t>
             </a:r>
           </a:p>
           <a:p>
             <a:pPr lvl="4"/>
             <a:r>
-              <a:rPr lang="en-US" smtClean="0"/>
+              <a:rPr lang="en-US"/>
               <a:t>Fifth level</a:t>
             </a:r>
-            <a:endParaRPr lang="en-US"/>
           </a:p>
         </p:txBody>
       </p:sp>
@@ -1764,7 +1765,7 @@
           <a:p>
             <a:fld id="{5BCAD085-E8A6-8845-BD4E-CB4CCA059FC4}" type="datetimeFigureOut">
               <a:rPr lang="en-US" smtClean="0"/>
-              <a:t>1/27/13</a:t>
+              <a:t>10/29/2026</a:t>
             </a:fld>
             <a:endParaRPr lang="en-US"/>
           </a:p>
@@ -1858,10 +1859,9 @@
           <a:lstStyle/>
           <a:p>
             <a:r>
-              <a:rPr lang="en-US" smtClean="0"/>
+              <a:rPr lang="en-US"/>
               <a:t>Click to edit Master title style</a:t>
             </a:r>
-            <a:endParaRPr lang="en-US"/>
           </a:p>
         </p:txBody>
       </p:sp>
@@ -1882,7 +1882,7 @@
           <a:p>
             <a:fld id="{5BCAD085-E8A6-8845-BD4E-CB4CCA059FC4}" type="datetimeFigureOut">
               <a:rPr lang="en-US" smtClean="0"/>
-              <a:t>1/27/13</a:t>
+              <a:t>10/29/2026</a:t>
             </a:fld>
             <a:endParaRPr lang="en-US"/>
           </a:p>
@@ -1977,7 +1977,7 @@
           <a:p>
             <a:fld id="{5BCAD085-E8A6-8845-BD4E-CB4CCA059FC4}" type="datetimeFigureOut">
               <a:rPr lang="en-US" smtClean="0"/>
-              <a:t>1/27/13</a:t>
+              <a:t>10/29/2026</a:t>
             </a:fld>
             <a:endParaRPr lang="en-US"/>
           </a:p>
@@ -2080,10 +2080,9 @@
           </a:lstStyle>
           <a:p>
             <a:r>
-              <a:rPr lang="en-US" smtClean="0"/>
+              <a:rPr lang="en-US"/>
               <a:t>Click to edit Master title style</a:t>
             </a:r>
-            <a:endParaRPr lang="en-US"/>
           </a:p>
         </p:txBody>
       </p:sp>
@@ -2137,38 +2136,37 @@
           <a:p>
             <a:pPr lvl="0"/>
             <a:r>
-              <a:rPr lang="en-US" smtClean="0"/>
+              <a:rPr lang="en-US"/>
               <a:t>Click to edit Master text styles</a:t>
             </a:r>
           </a:p>
           <a:p>
             <a:pPr lvl="1"/>
             <a:r>
-              <a:rPr lang="en-US" smtClean="0"/>
+              <a:rPr lang="en-US"/>
               <a:t>Second level</a:t>
             </a:r>
           </a:p>
           <a:p>
             <a:pPr lvl="2"/>
             <a:r>
-              <a:rPr lang="en-US" smtClean="0"/>
+              <a:rPr lang="en-US"/>
               <a:t>Third level</a:t>
             </a:r>
           </a:p>
           <a:p>
             <a:pPr lvl="3"/>
             <a:r>
-              <a:rPr lang="en-US" smtClean="0"/>
+              <a:rPr lang="en-US"/>
               <a:t>Fourth level</a:t>
             </a:r>
           </a:p>
           <a:p>
             <a:pPr lvl="4"/>
             <a:r>
-              <a:rPr lang="en-US" smtClean="0"/>
+              <a:rPr lang="en-US"/>
               <a:t>Fifth level</a:t>
             </a:r>
-            <a:endParaRPr lang="en-US"/>
           </a:p>
         </p:txBody>
       </p:sp>
@@ -2231,7 +2229,7 @@
           <a:p>
             <a:pPr lvl="0"/>
             <a:r>
-              <a:rPr lang="en-US" smtClean="0"/>
+              <a:rPr lang="en-US"/>
               <a:t>Click to edit Master text styles</a:t>
             </a:r>
           </a:p>
@@ -2254,7 +2252,7 @@
           <a:p>
             <a:fld id="{5BCAD085-E8A6-8845-BD4E-CB4CCA059FC4}" type="datetimeFigureOut">
               <a:rPr lang="en-US" smtClean="0"/>
-              <a:t>1/27/13</a:t>
+              <a:t>10/29/2026</a:t>
             </a:fld>
             <a:endParaRPr lang="en-US"/>
           </a:p>
@@ -2357,10 +2355,9 @@
           </a:lstStyle>
           <a:p>
             <a:r>
-              <a:rPr lang="en-US" smtClean="0"/>
+              <a:rPr lang="en-US"/>
               <a:t>Click to edit Master title style</a:t>
             </a:r>
-            <a:endParaRPr lang="en-US"/>
           </a:p>
         </p:txBody>
       </p:sp>
@@ -2484,7 +2481,7 @@
           <a:p>
             <a:pPr lvl="0"/>
             <a:r>
-              <a:rPr lang="en-US" smtClean="0"/>
+              <a:rPr lang="en-US"/>
               <a:t>Click to edit Master text styles</a:t>
             </a:r>
           </a:p>
@@ -2507,7 +2504,7 @@
           <a:p>
             <a:fld id="{5BCAD085-E8A6-8845-BD4E-CB4CCA059FC4}" type="datetimeFigureOut">
               <a:rPr lang="en-US" smtClean="0"/>
-              <a:t>1/27/13</a:t>
+              <a:t>10/29/2026</a:t>
             </a:fld>
             <a:endParaRPr lang="en-US"/>
           </a:p>
@@ -2616,10 +2613,9 @@
           <a:lstStyle/>
           <a:p>
             <a:r>
-              <a:rPr lang="en-US" smtClean="0"/>
+              <a:rPr lang="en-US"/>
               <a:t>Click to edit Master title style</a:t>
             </a:r>
-            <a:endParaRPr lang="en-US"/>
           </a:p>
         </p:txBody>
       </p:sp>
@@ -2650,38 +2646,37 @@
           <a:p>
             <a:pPr lvl="0"/>
             <a:r>
-              <a:rPr lang="en-US" smtClean="0"/>
+              <a:rPr lang="en-US"/>
               <a:t>Click to edit Master text styles</a:t>
             </a:r>
           </a:p>
           <a:p>
             <a:pPr lvl="1"/>
             <a:r>
-              <a:rPr lang="en-US" smtClean="0"/>
+              <a:rPr lang="en-US"/>
               <a:t>Second level</a:t>
             </a:r>
           </a:p>
           <a:p>
             <a:pPr lvl="2"/>
             <a:r>
-              <a:rPr lang="en-US" smtClean="0"/>
+              <a:rPr lang="en-US"/>
               <a:t>Third level</a:t>
             </a:r>
           </a:p>
           <a:p>
             <a:pPr lvl="3"/>
             <a:r>
-              <a:rPr lang="en-US" smtClean="0"/>
+              <a:rPr lang="en-US"/>
               <a:t>Fourth level</a:t>
             </a:r>
           </a:p>
           <a:p>
             <a:pPr lvl="4"/>
             <a:r>
-              <a:rPr lang="en-US" smtClean="0"/>
+              <a:rPr lang="en-US"/>
               <a:t>Fifth level</a:t>
             </a:r>
-            <a:endParaRPr lang="en-US"/>
           </a:p>
         </p:txBody>
       </p:sp>
@@ -2720,7 +2715,7 @@
           <a:p>
             <a:fld id="{5BCAD085-E8A6-8845-BD4E-CB4CCA059FC4}" type="datetimeFigureOut">
               <a:rPr lang="en-US" smtClean="0"/>
-              <a:t>1/27/13</a:t>
+              <a:t>10/29/2026</a:t>
             </a:fld>
             <a:endParaRPr lang="en-US"/>
           </a:p>
@@ -3079,7 +3074,7 @@
 </file>
 
 <file path=ppt/slides/slide1.xml><?xml version="1.0" encoding="utf-8"?>
-<p:sld xmlns:a="http://schemas.openxmlformats.org/drawingml/2006/main" xmlns:p="http://schemas.openxmlformats.org/presentationml/2006/main" xmlns:r="http://schemas.openxmlformats.org/officeDocument/2006/relationships">
+<p:sld xmlns:a="http://schemas.openxmlformats.org/drawingml/2006/main" xmlns:r="http://schemas.openxmlformats.org/officeDocument/2006/relationships" xmlns:p="http://schemas.openxmlformats.org/presentationml/2006/main">
   <p:cSld>
     <p:spTree>
       <p:nvGrpSpPr>
@@ -3087,7 +3082,14 @@
         <p:cNvGrpSpPr/>
         <p:nvPr/>
       </p:nvGrpSpPr>
-      <p:grpSpPr/>
+      <p:grpSpPr>
+        <a:xfrm>
+          <a:off x="0" y="0"/>
+          <a:ext cx="0" cy="0"/>
+          <a:chOff x="0" y="0"/>
+          <a:chExt cx="0" cy="0"/>
+        </a:xfrm>
+      </p:grpSpPr>
       <p:sp>
         <p:nvSpPr>
           <p:cNvPr id="2" name="TextBox 1"/>
@@ -3097,7 +3099,7 @@
         <p:spPr>
           <a:xfrm>
             <a:off x="576000" y="342000"/>
-            <a:ext cx="11160000" cy="360000"/>
+            <a:ext cx="11160000" cy="416140"/>
           </a:xfrm>
           <a:prstGeom prst="rect">
             <a:avLst/>
@@ -3105,7 +3107,7 @@
           <a:noFill/>
         </p:spPr>
         <p:txBody>
-          <a:bodyPr wrap="square" anchor="t" lIns="0" rIns="0" tIns="0" bIns="0">
+          <a:bodyPr wrap="square" lIns="0" tIns="0" rIns="0" bIns="0" anchor="t">
             <a:spAutoFit/>
           </a:bodyPr>
           <a:lstStyle/>
@@ -3116,14 +3118,38 @@
               </a:lnSpc>
             </a:pPr>
             <a:r>
-              <a:rPr sz="2500" b="1">
+              <a:rPr sz="2500" b="1" dirty="0" err="1">
                 <a:solidFill>
                   <a:srgbClr val="2B2A28"/>
                 </a:solidFill>
                 <a:latin typeface="맑은 고딕"/>
               </a:rPr>
-              <a:t>시스템 아키텍처 — 세계와 엔진을 갈라 둔다</a:t>
-            </a:r>
+              <a:t>시스템</a:t>
+            </a:r>
+            <a:r>
+              <a:rPr sz="2500" b="1" dirty="0">
+                <a:solidFill>
+                  <a:srgbClr val="2B2A28"/>
+                </a:solidFill>
+                <a:latin typeface="맑은 고딕"/>
+              </a:rPr>
+              <a:t> </a:t>
+            </a:r>
+            <a:r>
+              <a:rPr sz="2500" b="1" dirty="0" err="1">
+                <a:solidFill>
+                  <a:srgbClr val="2B2A28"/>
+                </a:solidFill>
+                <a:latin typeface="맑은 고딕"/>
+              </a:rPr>
+              <a:t>아키텍처</a:t>
+            </a:r>
+            <a:endParaRPr sz="2500" b="1" dirty="0">
+              <a:solidFill>
+                <a:srgbClr val="2B2A28"/>
+              </a:solidFill>
+              <a:latin typeface="맑은 고딕"/>
+            </a:endParaRPr>
           </a:p>
         </p:txBody>
       </p:sp>
@@ -3135,8 +3161,8 @@
         </p:nvSpPr>
         <p:spPr>
           <a:xfrm>
-            <a:off x="576000" y="756000"/>
-            <a:ext cx="11160000" cy="288000"/>
+            <a:off x="576000" y="873000"/>
+            <a:ext cx="11160000" cy="208070"/>
           </a:xfrm>
           <a:prstGeom prst="rect">
             <a:avLst/>
@@ -3144,7 +3170,7 @@
           <a:noFill/>
         </p:spPr>
         <p:txBody>
-          <a:bodyPr wrap="square" anchor="t" lIns="0" rIns="0" tIns="0" bIns="0">
+          <a:bodyPr wrap="square" lIns="0" tIns="0" rIns="0" bIns="0" anchor="t">
             <a:spAutoFit/>
           </a:bodyPr>
           <a:lstStyle/>
@@ -3155,13 +3181,166 @@
               </a:lnSpc>
             </a:pPr>
             <a:r>
-              <a:rPr sz="1250" b="0">
+              <a:rPr sz="1250" b="0" dirty="0" err="1">
                 <a:solidFill>
                   <a:srgbClr val="797672"/>
                 </a:solidFill>
                 <a:latin typeface="맑은 고딕"/>
               </a:rPr>
-              <a:t>엔진은 세계를 바꿀 수 없고, 세계는 어느 엔진이 도는지 모른다. 그래야 “무엇이 효과를 냈나” 를 말할 수 있다</a:t>
+              <a:t>엔진은</a:t>
+            </a:r>
+            <a:r>
+              <a:rPr sz="1250" b="0" dirty="0">
+                <a:solidFill>
+                  <a:srgbClr val="797672"/>
+                </a:solidFill>
+                <a:latin typeface="맑은 고딕"/>
+              </a:rPr>
+              <a:t> </a:t>
+            </a:r>
+            <a:r>
+              <a:rPr sz="1250" b="0" dirty="0" err="1">
+                <a:solidFill>
+                  <a:srgbClr val="797672"/>
+                </a:solidFill>
+                <a:latin typeface="맑은 고딕"/>
+              </a:rPr>
+              <a:t>세계를</a:t>
+            </a:r>
+            <a:r>
+              <a:rPr sz="1250" b="0" dirty="0">
+                <a:solidFill>
+                  <a:srgbClr val="797672"/>
+                </a:solidFill>
+                <a:latin typeface="맑은 고딕"/>
+              </a:rPr>
+              <a:t> </a:t>
+            </a:r>
+            <a:r>
+              <a:rPr sz="1250" b="0" dirty="0" err="1">
+                <a:solidFill>
+                  <a:srgbClr val="797672"/>
+                </a:solidFill>
+                <a:latin typeface="맑은 고딕"/>
+              </a:rPr>
+              <a:t>바꿀</a:t>
+            </a:r>
+            <a:r>
+              <a:rPr sz="1250" b="0" dirty="0">
+                <a:solidFill>
+                  <a:srgbClr val="797672"/>
+                </a:solidFill>
+                <a:latin typeface="맑은 고딕"/>
+              </a:rPr>
+              <a:t> 수 </a:t>
+            </a:r>
+            <a:r>
+              <a:rPr sz="1250" b="0" dirty="0" err="1">
+                <a:solidFill>
+                  <a:srgbClr val="797672"/>
+                </a:solidFill>
+                <a:latin typeface="맑은 고딕"/>
+              </a:rPr>
+              <a:t>없고</a:t>
+            </a:r>
+            <a:r>
+              <a:rPr sz="1250" b="0" dirty="0">
+                <a:solidFill>
+                  <a:srgbClr val="797672"/>
+                </a:solidFill>
+                <a:latin typeface="맑은 고딕"/>
+              </a:rPr>
+              <a:t>, </a:t>
+            </a:r>
+            <a:r>
+              <a:rPr sz="1250" b="0" dirty="0" err="1">
+                <a:solidFill>
+                  <a:srgbClr val="797672"/>
+                </a:solidFill>
+                <a:latin typeface="맑은 고딕"/>
+              </a:rPr>
+              <a:t>세계는</a:t>
+            </a:r>
+            <a:r>
+              <a:rPr sz="1250" b="0" dirty="0">
+                <a:solidFill>
+                  <a:srgbClr val="797672"/>
+                </a:solidFill>
+                <a:latin typeface="맑은 고딕"/>
+              </a:rPr>
+              <a:t> </a:t>
+            </a:r>
+            <a:r>
+              <a:rPr sz="1250" b="0" dirty="0" err="1">
+                <a:solidFill>
+                  <a:srgbClr val="797672"/>
+                </a:solidFill>
+                <a:latin typeface="맑은 고딕"/>
+              </a:rPr>
+              <a:t>어느</a:t>
+            </a:r>
+            <a:r>
+              <a:rPr sz="1250" b="0" dirty="0">
+                <a:solidFill>
+                  <a:srgbClr val="797672"/>
+                </a:solidFill>
+                <a:latin typeface="맑은 고딕"/>
+              </a:rPr>
+              <a:t> </a:t>
+            </a:r>
+            <a:r>
+              <a:rPr sz="1250" b="0" dirty="0" err="1">
+                <a:solidFill>
+                  <a:srgbClr val="797672"/>
+                </a:solidFill>
+                <a:latin typeface="맑은 고딕"/>
+              </a:rPr>
+              <a:t>엔진이</a:t>
+            </a:r>
+            <a:r>
+              <a:rPr sz="1250" b="0" dirty="0">
+                <a:solidFill>
+                  <a:srgbClr val="797672"/>
+                </a:solidFill>
+                <a:latin typeface="맑은 고딕"/>
+              </a:rPr>
+              <a:t> </a:t>
+            </a:r>
+            <a:r>
+              <a:rPr sz="1250" b="0" dirty="0" err="1">
+                <a:solidFill>
+                  <a:srgbClr val="797672"/>
+                </a:solidFill>
+                <a:latin typeface="맑은 고딕"/>
+              </a:rPr>
+              <a:t>도는지</a:t>
+            </a:r>
+            <a:r>
+              <a:rPr sz="1250" b="0" dirty="0">
+                <a:solidFill>
+                  <a:srgbClr val="797672"/>
+                </a:solidFill>
+                <a:latin typeface="맑은 고딕"/>
+              </a:rPr>
+              <a:t> </a:t>
+            </a:r>
+            <a:r>
+              <a:rPr sz="1250" b="0" dirty="0" err="1">
+                <a:solidFill>
+                  <a:srgbClr val="797672"/>
+                </a:solidFill>
+                <a:latin typeface="맑은 고딕"/>
+              </a:rPr>
+              <a:t>모른다</a:t>
+            </a:r>
+            <a:r>
+              <a:rPr sz="1250" b="0" dirty="0">
+                <a:solidFill>
+                  <a:srgbClr val="797672"/>
+                </a:solidFill>
+                <a:latin typeface="맑은 고딕"/>
+              </a:rPr>
+              <a:t>. </a:t>
             </a:r>
           </a:p>
         </p:txBody>
@@ -3211,6 +3390,7 @@
           <a:lstStyle/>
           <a:p>
             <a:pPr algn="ctr"/>
+            <a:endParaRPr/>
           </a:p>
         </p:txBody>
       </p:sp>
@@ -3231,7 +3411,7 @@
           <a:noFill/>
         </p:spPr>
         <p:txBody>
-          <a:bodyPr wrap="square" anchor="t" lIns="0" rIns="0" tIns="0" bIns="0">
+          <a:bodyPr wrap="square" lIns="0" tIns="0" rIns="0" bIns="0" anchor="t">
             <a:spAutoFit/>
           </a:bodyPr>
           <a:lstStyle/>
@@ -3270,7 +3450,7 @@
           <a:noFill/>
         </p:spPr>
         <p:txBody>
-          <a:bodyPr wrap="square" anchor="t" lIns="0" rIns="0" tIns="0" bIns="0">
+          <a:bodyPr wrap="square" lIns="0" tIns="0" rIns="0" bIns="0" anchor="t">
             <a:spAutoFit/>
           </a:bodyPr>
           <a:lstStyle/>
@@ -3369,6 +3549,7 @@
           <a:lstStyle/>
           <a:p>
             <a:pPr algn="ctr"/>
+            <a:endParaRPr/>
           </a:p>
         </p:txBody>
       </p:sp>
@@ -3389,7 +3570,7 @@
           <a:noFill/>
         </p:spPr>
         <p:txBody>
-          <a:bodyPr wrap="square" anchor="t" lIns="0" rIns="0" tIns="0" bIns="0">
+          <a:bodyPr wrap="square" lIns="0" tIns="0" rIns="0" bIns="0" anchor="t">
             <a:spAutoFit/>
           </a:bodyPr>
           <a:lstStyle/>
@@ -3428,7 +3609,7 @@
           <a:noFill/>
         </p:spPr>
         <p:txBody>
-          <a:bodyPr wrap="square" anchor="t" lIns="0" rIns="0" tIns="0" bIns="0">
+          <a:bodyPr wrap="square" lIns="0" tIns="0" rIns="0" bIns="0" anchor="t">
             <a:spAutoFit/>
           </a:bodyPr>
           <a:lstStyle/>
@@ -3535,7 +3716,7 @@
           <a:noFill/>
         </p:spPr>
         <p:txBody>
-          <a:bodyPr wrap="square" anchor="t" lIns="0" rIns="0" tIns="0" bIns="0">
+          <a:bodyPr wrap="square" lIns="0" tIns="0" rIns="0" bIns="0" anchor="t">
             <a:spAutoFit/>
           </a:bodyPr>
           <a:lstStyle/>
@@ -3610,7 +3791,7 @@
           <a:noFill/>
         </p:spPr>
         <p:txBody>
-          <a:bodyPr wrap="square" anchor="t" lIns="0" rIns="0" tIns="0" bIns="0">
+          <a:bodyPr wrap="square" lIns="0" tIns="0" rIns="0" bIns="0" anchor="t">
             <a:spAutoFit/>
           </a:bodyPr>
           <a:lstStyle/>
@@ -3677,6 +3858,7 @@
           <a:lstStyle/>
           <a:p>
             <a:pPr algn="ctr"/>
+            <a:endParaRPr/>
           </a:p>
         </p:txBody>
       </p:sp>
@@ -3697,7 +3879,7 @@
           <a:noFill/>
         </p:spPr>
         <p:txBody>
-          <a:bodyPr wrap="square" anchor="t" lIns="0" rIns="0" tIns="0" bIns="0">
+          <a:bodyPr wrap="square" lIns="0" tIns="0" rIns="0" bIns="0" anchor="t">
             <a:spAutoFit/>
           </a:bodyPr>
           <a:lstStyle/>
@@ -3764,6 +3946,7 @@
           <a:lstStyle/>
           <a:p>
             <a:pPr algn="ctr"/>
+            <a:endParaRPr/>
           </a:p>
         </p:txBody>
       </p:sp>
@@ -3784,7 +3967,7 @@
           <a:noFill/>
         </p:spPr>
         <p:txBody>
-          <a:bodyPr wrap="square" anchor="t" lIns="0" rIns="0" tIns="0" bIns="0">
+          <a:bodyPr wrap="square" lIns="0" tIns="0" rIns="0" bIns="0" anchor="t">
             <a:spAutoFit/>
           </a:bodyPr>
           <a:lstStyle/>
@@ -3823,7 +4006,7 @@
           <a:noFill/>
         </p:spPr>
         <p:txBody>
-          <a:bodyPr wrap="square" anchor="t" lIns="0" rIns="0" tIns="0" bIns="0">
+          <a:bodyPr wrap="square" lIns="0" tIns="0" rIns="0" bIns="0" anchor="t">
             <a:spAutoFit/>
           </a:bodyPr>
           <a:lstStyle/>
@@ -3906,6 +4089,7 @@
           <a:lstStyle/>
           <a:p>
             <a:pPr algn="ctr"/>
+            <a:endParaRPr/>
           </a:p>
         </p:txBody>
       </p:sp>
@@ -3926,7 +4110,7 @@
           <a:noFill/>
         </p:spPr>
         <p:txBody>
-          <a:bodyPr wrap="square" anchor="t" lIns="0" rIns="0" tIns="0" bIns="0">
+          <a:bodyPr wrap="square" lIns="0" tIns="0" rIns="0" bIns="0" anchor="t">
             <a:spAutoFit/>
           </a:bodyPr>
           <a:lstStyle/>
@@ -3965,7 +4149,7 @@
           <a:noFill/>
         </p:spPr>
         <p:txBody>
-          <a:bodyPr wrap="square" anchor="t" lIns="0" rIns="0" tIns="0" bIns="0">
+          <a:bodyPr wrap="square" lIns="0" tIns="0" rIns="0" bIns="0" anchor="t">
             <a:spAutoFit/>
           </a:bodyPr>
           <a:lstStyle/>
@@ -4048,6 +4232,7 @@
           <a:lstStyle/>
           <a:p>
             <a:pPr algn="ctr"/>
+            <a:endParaRPr/>
           </a:p>
         </p:txBody>
       </p:sp>
@@ -4068,7 +4253,7 @@
           <a:noFill/>
         </p:spPr>
         <p:txBody>
-          <a:bodyPr wrap="square" anchor="t" lIns="0" rIns="0" tIns="0" bIns="0">
+          <a:bodyPr wrap="square" lIns="0" tIns="0" rIns="0" bIns="0" anchor="t">
             <a:spAutoFit/>
           </a:bodyPr>
           <a:lstStyle/>
@@ -4107,7 +4292,7 @@
           <a:noFill/>
         </p:spPr>
         <p:txBody>
-          <a:bodyPr wrap="square" anchor="t" lIns="0" rIns="0" tIns="0" bIns="0">
+          <a:bodyPr wrap="square" lIns="0" tIns="0" rIns="0" bIns="0" anchor="t">
             <a:spAutoFit/>
           </a:bodyPr>
           <a:lstStyle/>
@@ -4190,6 +4375,7 @@
           <a:lstStyle/>
           <a:p>
             <a:pPr algn="ctr"/>
+            <a:endParaRPr/>
           </a:p>
         </p:txBody>
       </p:sp>
@@ -4210,7 +4396,7 @@
           <a:noFill/>
         </p:spPr>
         <p:txBody>
-          <a:bodyPr wrap="square" anchor="t" lIns="0" rIns="0" tIns="0" bIns="0">
+          <a:bodyPr wrap="square" lIns="0" tIns="0" rIns="0" bIns="0" anchor="t">
             <a:spAutoFit/>
           </a:bodyPr>
           <a:lstStyle/>
@@ -4249,7 +4435,7 @@
           <a:noFill/>
         </p:spPr>
         <p:txBody>
-          <a:bodyPr wrap="square" anchor="t" lIns="0" rIns="0" tIns="0" bIns="0">
+          <a:bodyPr wrap="square" lIns="0" tIns="0" rIns="0" bIns="0" anchor="t">
             <a:spAutoFit/>
           </a:bodyPr>
           <a:lstStyle/>
@@ -4332,6 +4518,7 @@
           <a:lstStyle/>
           <a:p>
             <a:pPr algn="ctr"/>
+            <a:endParaRPr/>
           </a:p>
         </p:txBody>
       </p:sp>
@@ -4352,7 +4539,7 @@
           <a:noFill/>
         </p:spPr>
         <p:txBody>
-          <a:bodyPr wrap="square" anchor="t" lIns="0" rIns="0" tIns="0" bIns="0">
+          <a:bodyPr wrap="square" lIns="0" tIns="0" rIns="0" bIns="0" anchor="t">
             <a:spAutoFit/>
           </a:bodyPr>
           <a:lstStyle/>
@@ -4383,7 +4570,7 @@
         <p:spPr>
           <a:xfrm>
             <a:off x="756000" y="5328000"/>
-            <a:ext cx="10692000" cy="792000"/>
+            <a:ext cx="10692000" cy="476092"/>
           </a:xfrm>
           <a:prstGeom prst="rect">
             <a:avLst/>
@@ -4391,7 +4578,7 @@
           <a:noFill/>
         </p:spPr>
         <p:txBody>
-          <a:bodyPr wrap="square" anchor="t" lIns="0" rIns="0" tIns="0" bIns="0">
+          <a:bodyPr wrap="square" lIns="0" tIns="0" rIns="0" bIns="0" anchor="t">
             <a:spAutoFit/>
           </a:bodyPr>
           <a:lstStyle/>
@@ -4402,14 +4589,137 @@
               </a:lnSpc>
             </a:pPr>
             <a:r>
-              <a:rPr sz="1100" b="0">
+              <a:rPr sz="1100" b="0" dirty="0">
                 <a:solidFill>
                   <a:srgbClr val="2B2A28"/>
                 </a:solidFill>
                 <a:latin typeface="맑은 고딕"/>
               </a:rPr>
-              <a:t>2D 히트맵 · 휴게소별 막대 · 3D 코리도(deck.gl)  —  **스냅샷 스트림만 읽는다**</a:t>
-            </a:r>
+              <a:t>2D </a:t>
+            </a:r>
+            <a:r>
+              <a:rPr sz="1100" b="0" dirty="0" err="1">
+                <a:solidFill>
+                  <a:srgbClr val="2B2A28"/>
+                </a:solidFill>
+                <a:latin typeface="맑은 고딕"/>
+              </a:rPr>
+              <a:t>히트맵</a:t>
+            </a:r>
+            <a:r>
+              <a:rPr sz="1100" b="0" dirty="0">
+                <a:solidFill>
+                  <a:srgbClr val="2B2A28"/>
+                </a:solidFill>
+                <a:latin typeface="맑은 고딕"/>
+              </a:rPr>
+              <a:t> · </a:t>
+            </a:r>
+            <a:r>
+              <a:rPr sz="1100" b="0" dirty="0" err="1">
+                <a:solidFill>
+                  <a:srgbClr val="2B2A28"/>
+                </a:solidFill>
+                <a:latin typeface="맑은 고딕"/>
+              </a:rPr>
+              <a:t>휴게소별</a:t>
+            </a:r>
+            <a:r>
+              <a:rPr sz="1100" b="0" dirty="0">
+                <a:solidFill>
+                  <a:srgbClr val="2B2A28"/>
+                </a:solidFill>
+                <a:latin typeface="맑은 고딕"/>
+              </a:rPr>
+              <a:t> </a:t>
+            </a:r>
+            <a:r>
+              <a:rPr sz="1100" b="0" dirty="0" err="1">
+                <a:solidFill>
+                  <a:srgbClr val="2B2A28"/>
+                </a:solidFill>
+                <a:latin typeface="맑은 고딕"/>
+              </a:rPr>
+              <a:t>막대</a:t>
+            </a:r>
+            <a:r>
+              <a:rPr sz="1100" b="0" dirty="0">
+                <a:solidFill>
+                  <a:srgbClr val="2B2A28"/>
+                </a:solidFill>
+                <a:latin typeface="맑은 고딕"/>
+              </a:rPr>
+              <a:t> · 3D </a:t>
+            </a:r>
+            <a:r>
+              <a:rPr sz="1100" b="0" dirty="0" err="1">
+                <a:solidFill>
+                  <a:srgbClr val="2B2A28"/>
+                </a:solidFill>
+                <a:latin typeface="맑은 고딕"/>
+              </a:rPr>
+              <a:t>코리도</a:t>
+            </a:r>
+            <a:r>
+              <a:rPr sz="1100" b="0" dirty="0">
+                <a:solidFill>
+                  <a:srgbClr val="2B2A28"/>
+                </a:solidFill>
+                <a:latin typeface="맑은 고딕"/>
+              </a:rPr>
+              <a:t>(deck.gl)  —  </a:t>
+            </a:r>
+            <a:r>
+              <a:rPr sz="1100" b="0" dirty="0" err="1">
+                <a:solidFill>
+                  <a:srgbClr val="2B2A28"/>
+                </a:solidFill>
+                <a:latin typeface="맑은 고딕"/>
+              </a:rPr>
+              <a:t>스냅샷</a:t>
+            </a:r>
+            <a:r>
+              <a:rPr sz="1100" b="0" dirty="0">
+                <a:solidFill>
+                  <a:srgbClr val="2B2A28"/>
+                </a:solidFill>
+                <a:latin typeface="맑은 고딕"/>
+              </a:rPr>
+              <a:t> </a:t>
+            </a:r>
+            <a:r>
+              <a:rPr sz="1100" b="0" dirty="0" err="1">
+                <a:solidFill>
+                  <a:srgbClr val="2B2A28"/>
+                </a:solidFill>
+                <a:latin typeface="맑은 고딕"/>
+              </a:rPr>
+              <a:t>스트림만</a:t>
+            </a:r>
+            <a:r>
+              <a:rPr sz="1100" b="0" dirty="0">
+                <a:solidFill>
+                  <a:srgbClr val="2B2A28"/>
+                </a:solidFill>
+                <a:latin typeface="맑은 고딕"/>
+              </a:rPr>
+              <a:t> </a:t>
+            </a:r>
+            <a:r>
+              <a:rPr sz="1100" b="0" dirty="0" err="1">
+                <a:solidFill>
+                  <a:srgbClr val="2B2A28"/>
+                </a:solidFill>
+                <a:latin typeface="맑은 고딕"/>
+              </a:rPr>
+              <a:t>읽는다</a:t>
+            </a:r>
+            <a:endParaRPr sz="1100" b="0" dirty="0">
+              <a:solidFill>
+                <a:srgbClr val="2B2A28"/>
+              </a:solidFill>
+              <a:latin typeface="맑은 고딕"/>
+            </a:endParaRPr>
           </a:p>
           <a:p>
             <a:pPr algn="l">
@@ -4418,14 +4728,155 @@
               </a:lnSpc>
             </a:pPr>
             <a:r>
-              <a:rPr sz="1100" b="0">
+              <a:rPr sz="1100" b="0" dirty="0">
                 <a:solidFill>
                   <a:srgbClr val="2B2A28"/>
                 </a:solidFill>
                 <a:latin typeface="맑은 고딕"/>
               </a:rPr>
-              <a:t>⚠ 뷰어는 엔진을 임포트할 수 없다. 문서가 아니라 **AST 테스트가 막는다**</a:t>
-            </a:r>
+              <a:t>⚠ </a:t>
+            </a:r>
+            <a:r>
+              <a:rPr sz="1100" b="0" dirty="0" err="1">
+                <a:solidFill>
+                  <a:srgbClr val="2B2A28"/>
+                </a:solidFill>
+                <a:latin typeface="맑은 고딕"/>
+              </a:rPr>
+              <a:t>뷰어는</a:t>
+            </a:r>
+            <a:r>
+              <a:rPr sz="1100" b="0" dirty="0">
+                <a:solidFill>
+                  <a:srgbClr val="2B2A28"/>
+                </a:solidFill>
+                <a:latin typeface="맑은 고딕"/>
+              </a:rPr>
+              <a:t> </a:t>
+            </a:r>
+            <a:r>
+              <a:rPr sz="1100" b="0" dirty="0" err="1">
+                <a:solidFill>
+                  <a:srgbClr val="2B2A28"/>
+                </a:solidFill>
+                <a:latin typeface="맑은 고딕"/>
+              </a:rPr>
+              <a:t>엔진을</a:t>
+            </a:r>
+            <a:r>
+              <a:rPr sz="1100" b="0" dirty="0">
+                <a:solidFill>
+                  <a:srgbClr val="2B2A28"/>
+                </a:solidFill>
+                <a:latin typeface="맑은 고딕"/>
+              </a:rPr>
+              <a:t> </a:t>
+            </a:r>
+            <a:r>
+              <a:rPr sz="1100" b="0" dirty="0" err="1">
+                <a:solidFill>
+                  <a:srgbClr val="2B2A28"/>
+                </a:solidFill>
+                <a:latin typeface="맑은 고딕"/>
+              </a:rPr>
+              <a:t>임포트할</a:t>
+            </a:r>
+            <a:r>
+              <a:rPr sz="1100" b="0" dirty="0">
+                <a:solidFill>
+                  <a:srgbClr val="2B2A28"/>
+                </a:solidFill>
+                <a:latin typeface="맑은 고딕"/>
+              </a:rPr>
+              <a:t> 수 </a:t>
+            </a:r>
+            <a:r>
+              <a:rPr sz="1100" b="0" dirty="0" err="1">
+                <a:solidFill>
+                  <a:srgbClr val="2B2A28"/>
+                </a:solidFill>
+                <a:latin typeface="맑은 고딕"/>
+              </a:rPr>
+              <a:t>없다</a:t>
+            </a:r>
+            <a:r>
+              <a:rPr sz="1100" b="0" dirty="0">
+                <a:solidFill>
+                  <a:srgbClr val="2B2A28"/>
+                </a:solidFill>
+                <a:latin typeface="맑은 고딕"/>
+              </a:rPr>
+              <a:t>. </a:t>
+            </a:r>
+            <a:r>
+              <a:rPr sz="1100" b="0" dirty="0" err="1">
+                <a:solidFill>
+                  <a:srgbClr val="2B2A28"/>
+                </a:solidFill>
+                <a:latin typeface="맑은 고딕"/>
+              </a:rPr>
+              <a:t>문서가</a:t>
+            </a:r>
+            <a:r>
+              <a:rPr sz="1100" b="0" dirty="0">
+                <a:solidFill>
+                  <a:srgbClr val="2B2A28"/>
+                </a:solidFill>
+                <a:latin typeface="맑은 고딕"/>
+              </a:rPr>
+              <a:t> </a:t>
+            </a:r>
+            <a:r>
+              <a:rPr sz="1100" b="0" dirty="0" err="1">
+                <a:solidFill>
+                  <a:srgbClr val="2B2A28"/>
+                </a:solidFill>
+                <a:latin typeface="맑은 고딕"/>
+              </a:rPr>
+              <a:t>아니라</a:t>
+            </a:r>
+            <a:r>
+              <a:rPr sz="1100" b="0" dirty="0">
+                <a:solidFill>
+                  <a:srgbClr val="2B2A28"/>
+                </a:solidFill>
+                <a:latin typeface="맑은 고딕"/>
+              </a:rPr>
+              <a:t> AST </a:t>
+            </a:r>
+            <a:r>
+              <a:rPr sz="1100" b="0" dirty="0" err="1">
+                <a:solidFill>
+                  <a:srgbClr val="2B2A28"/>
+                </a:solidFill>
+                <a:latin typeface="맑은 고딕"/>
+              </a:rPr>
+              <a:t>테스트가</a:t>
+            </a:r>
+            <a:r>
+              <a:rPr sz="1100" b="0" dirty="0">
+                <a:solidFill>
+                  <a:srgbClr val="2B2A28"/>
+                </a:solidFill>
+                <a:latin typeface="맑은 고딕"/>
+              </a:rPr>
+              <a:t> </a:t>
+            </a:r>
+            <a:r>
+              <a:rPr sz="1100" b="0" dirty="0" err="1">
+                <a:solidFill>
+                  <a:srgbClr val="2B2A28"/>
+                </a:solidFill>
+                <a:latin typeface="맑은 고딕"/>
+              </a:rPr>
+              <a:t>막는다</a:t>
+            </a:r>
+            <a:endParaRPr sz="1100" b="0" dirty="0">
+              <a:solidFill>
+                <a:srgbClr val="2B2A28"/>
+              </a:solidFill>
+              <a:latin typeface="맑은 고딕"/>
+            </a:endParaRPr>
           </a:p>
         </p:txBody>
       </p:sp>
@@ -4501,128 +4952,6 @@
           </a:fontRef>
         </p:style>
       </p:cxnSp>
-      <p:sp>
-        <p:nvSpPr>
-          <p:cNvPr id="33" name="Rectangle 32"/>
-          <p:cNvSpPr/>
-          <p:nvPr/>
-        </p:nvSpPr>
-        <p:spPr>
-          <a:xfrm>
-            <a:off x="576000" y="6300000"/>
-            <a:ext cx="36000" cy="540000"/>
-          </a:xfrm>
-          <a:prstGeom prst="rect">
-            <a:avLst/>
-          </a:prstGeom>
-          <a:solidFill>
-            <a:srgbClr val="C45646"/>
-          </a:solidFill>
-          <a:ln>
-            <a:noFill/>
-          </a:ln>
-          <a:effectLst/>
-        </p:spPr>
-        <p:style>
-          <a:lnRef idx="1">
-            <a:schemeClr val="accent1"/>
-          </a:lnRef>
-          <a:fillRef idx="3">
-            <a:schemeClr val="accent1"/>
-          </a:fillRef>
-          <a:effectRef idx="2">
-            <a:schemeClr val="accent1"/>
-          </a:effectRef>
-          <a:fontRef idx="minor">
-            <a:schemeClr val="lt1"/>
-          </a:fontRef>
-        </p:style>
-        <p:txBody>
-          <a:bodyPr rtlCol="0" anchor="ctr"/>
-          <a:lstStyle/>
-          <a:p>
-            <a:pPr algn="ctr"/>
-          </a:p>
-        </p:txBody>
-      </p:sp>
-      <p:sp>
-        <p:nvSpPr>
-          <p:cNvPr id="34" name="TextBox 33"/>
-          <p:cNvSpPr txBox="1"/>
-          <p:nvPr/>
-        </p:nvSpPr>
-        <p:spPr>
-          <a:xfrm>
-            <a:off x="756000" y="6282000"/>
-            <a:ext cx="10800000" cy="540000"/>
-          </a:xfrm>
-          <a:prstGeom prst="rect">
-            <a:avLst/>
-          </a:prstGeom>
-          <a:noFill/>
-        </p:spPr>
-        <p:txBody>
-          <a:bodyPr wrap="square" anchor="t" lIns="0" rIns="0" tIns="0" bIns="0">
-            <a:spAutoFit/>
-          </a:bodyPr>
-          <a:lstStyle/>
-          <a:p>
-            <a:pPr algn="l">
-              <a:lnSpc>
-                <a:spcPct val="145000"/>
-              </a:lnSpc>
-            </a:pPr>
-            <a:r>
-              <a:rPr sz="1150" b="1">
-                <a:solidFill>
-                  <a:srgbClr val="2B2A28"/>
-                </a:solidFill>
-                <a:latin typeface="맑은 고딕"/>
-              </a:rPr>
-              <a:t>설계 규칙을 **테스트로 강제한다** — 뷰어↔엔진 임포트 차단(AST) · 큐 규칙 호출자 2곳 제한 · 그림이 KPI 와 다르면 저장 거부 · 문서 수치 회귀 94개</a:t>
-            </a:r>
-          </a:p>
-        </p:txBody>
-      </p:sp>
-      <p:sp>
-        <p:nvSpPr>
-          <p:cNvPr id="35" name="TextBox 34"/>
-          <p:cNvSpPr txBox="1"/>
-          <p:nvPr/>
-        </p:nvSpPr>
-        <p:spPr>
-          <a:xfrm>
-            <a:off x="576000" y="6390000"/>
-            <a:ext cx="11160000" cy="288000"/>
-          </a:xfrm>
-          <a:prstGeom prst="rect">
-            <a:avLst/>
-          </a:prstGeom>
-          <a:noFill/>
-        </p:spPr>
-        <p:txBody>
-          <a:bodyPr wrap="square" anchor="t" lIns="0" rIns="0" tIns="0" bIns="0">
-            <a:spAutoFit/>
-          </a:bodyPr>
-          <a:lstStyle/>
-          <a:p>
-            <a:pPr algn="l">
-              <a:lnSpc>
-                <a:spcPct val="120000"/>
-              </a:lnSpc>
-            </a:pPr>
-            <a:r>
-              <a:rPr sz="900" b="0">
-                <a:solidFill>
-                  <a:srgbClr val="797672"/>
-                </a:solidFill>
-                <a:latin typeface="맑은 고딕"/>
-              </a:rPr>
-              <a:t>Python 45k 줄 (src 15.3k · tests 11.3k) · 테스트 699개 · 단일 저장소</a:t>
-            </a:r>
-          </a:p>
-        </p:txBody>
-      </p:sp>
     </p:spTree>
   </p:cSld>
   <p:clrMapOvr>
